--- a/Présentation_TER_Steiner.pptx
+++ b/Présentation_TER_Steiner.pptx
@@ -2180,7 +2180,7 @@
                 <a:latin typeface="Arial MT"/>
                 <a:cs typeface="Arial MT"/>
               </a:rPr>
-              <a:t>Guillaume</a:t>
+              <a:t>Clo</a:t>
             </a:r>
             <a:endParaRPr sz="1100">
               <a:latin typeface="Arial MT"/>
